--- a/slides/slides_functions.pptx
+++ b/slides/slides_functions.pptx
@@ -22,6 +22,7 @@
     <p:sldId id="260" r:id="rId16"/>
     <p:sldId id="262" r:id="rId17"/>
     <p:sldId id="267" r:id="rId18"/>
+    <p:sldId id="302" r:id="rId19"/>
   </p:sldIdLst>
   <p:sldSz cx="9144000" cy="5143500" type="screen16x9"/>
   <p:notesSz cx="6858000" cy="9144000"/>
@@ -276,7 +277,7 @@
             <a:fld id="{11D00EF0-620D-6D42-BE8F-A31A5DBBF69B}" type="datetimeFigureOut">
               <a:rPr lang="en-US" smtClean="0"/>
               <a:pPr/>
-              <a:t>10/27/25</a:t>
+              <a:t>10/26/26</a:t>
             </a:fld>
             <a:endParaRPr lang="en-US"/>
           </a:p>
@@ -458,7 +459,7 @@
           <a:p>
             <a:fld id="{11D00EF0-620D-6D42-BE8F-A31A5DBBF69B}" type="datetimeFigureOut">
               <a:rPr lang="en-US" smtClean="0"/>
-              <a:t>10/27/25</a:t>
+              <a:t>10/26/26</a:t>
             </a:fld>
             <a:endParaRPr lang="en-US"/>
           </a:p>
@@ -633,7 +634,7 @@
           <a:p>
             <a:fld id="{11D00EF0-620D-6D42-BE8F-A31A5DBBF69B}" type="datetimeFigureOut">
               <a:rPr lang="en-US" smtClean="0"/>
-              <a:t>10/27/25</a:t>
+              <a:t>10/26/26</a:t>
             </a:fld>
             <a:endParaRPr lang="en-US"/>
           </a:p>
@@ -837,7 +838,7 @@
             <a:fld id="{11D00EF0-620D-6D42-BE8F-A31A5DBBF69B}" type="datetimeFigureOut">
               <a:rPr lang="en-US" smtClean="0"/>
               <a:pPr/>
-              <a:t>10/27/25</a:t>
+              <a:t>10/26/26</a:t>
             </a:fld>
             <a:endParaRPr lang="en-US"/>
           </a:p>
@@ -1089,7 +1090,7 @@
           <a:p>
             <a:fld id="{11D00EF0-620D-6D42-BE8F-A31A5DBBF69B}" type="datetimeFigureOut">
               <a:rPr lang="en-US" smtClean="0"/>
-              <a:t>10/27/25</a:t>
+              <a:t>10/26/26</a:t>
             </a:fld>
             <a:endParaRPr lang="en-US"/>
           </a:p>
@@ -1316,7 +1317,7 @@
           <a:p>
             <a:fld id="{11D00EF0-620D-6D42-BE8F-A31A5DBBF69B}" type="datetimeFigureOut">
               <a:rPr lang="en-US" smtClean="0"/>
-              <a:t>10/27/25</a:t>
+              <a:t>10/26/26</a:t>
             </a:fld>
             <a:endParaRPr lang="en-US"/>
           </a:p>
@@ -1678,7 +1679,7 @@
           <a:p>
             <a:fld id="{11D00EF0-620D-6D42-BE8F-A31A5DBBF69B}" type="datetimeFigureOut">
               <a:rPr lang="en-US" smtClean="0"/>
-              <a:t>10/27/25</a:t>
+              <a:t>10/26/26</a:t>
             </a:fld>
             <a:endParaRPr lang="en-US"/>
           </a:p>
@@ -1791,7 +1792,7 @@
           <a:p>
             <a:fld id="{11D00EF0-620D-6D42-BE8F-A31A5DBBF69B}" type="datetimeFigureOut">
               <a:rPr lang="en-US" smtClean="0"/>
-              <a:t>10/27/25</a:t>
+              <a:t>10/26/26</a:t>
             </a:fld>
             <a:endParaRPr lang="en-US"/>
           </a:p>
@@ -1881,7 +1882,7 @@
           <a:p>
             <a:fld id="{11D00EF0-620D-6D42-BE8F-A31A5DBBF69B}" type="datetimeFigureOut">
               <a:rPr lang="en-US" smtClean="0"/>
-              <a:t>10/27/25</a:t>
+              <a:t>10/26/26</a:t>
             </a:fld>
             <a:endParaRPr lang="en-US"/>
           </a:p>
@@ -2153,7 +2154,7 @@
           <a:p>
             <a:fld id="{11D00EF0-620D-6D42-BE8F-A31A5DBBF69B}" type="datetimeFigureOut">
               <a:rPr lang="en-US" smtClean="0"/>
-              <a:t>10/27/25</a:t>
+              <a:t>10/26/26</a:t>
             </a:fld>
             <a:endParaRPr lang="en-US"/>
           </a:p>
@@ -2405,7 +2406,7 @@
           <a:p>
             <a:fld id="{11D00EF0-620D-6D42-BE8F-A31A5DBBF69B}" type="datetimeFigureOut">
               <a:rPr lang="en-US" smtClean="0"/>
-              <a:t>10/27/25</a:t>
+              <a:t>10/26/26</a:t>
             </a:fld>
             <a:endParaRPr lang="en-US"/>
           </a:p>
@@ -2613,7 +2614,7 @@
           <a:p>
             <a:fld id="{11D00EF0-620D-6D42-BE8F-A31A5DBBF69B}" type="datetimeFigureOut">
               <a:rPr lang="en-US" smtClean="0"/>
-              <a:t>10/27/25</a:t>
+              <a:t>10/26/26</a:t>
             </a:fld>
             <a:endParaRPr lang="en-US"/>
           </a:p>
@@ -3861,6 +3862,66 @@
     <p:extLst>
       <p:ext uri="{BB962C8B-B14F-4D97-AF65-F5344CB8AC3E}">
         <p14:creationId xmlns:p14="http://schemas.microsoft.com/office/powerpoint/2010/main" val="480457216"/>
+      </p:ext>
+    </p:extLst>
+  </p:cSld>
+  <p:clrMapOvr>
+    <a:masterClrMapping/>
+  </p:clrMapOvr>
+</p:sld>
+</file>
+
+<file path=ppt/slides/slide18.xml><?xml version="1.0" encoding="utf-8"?>
+<p:sld xmlns:a="http://schemas.openxmlformats.org/drawingml/2006/main" xmlns:r="http://schemas.openxmlformats.org/officeDocument/2006/relationships" xmlns:p="http://schemas.openxmlformats.org/presentationml/2006/main">
+  <p:cSld>
+    <p:spTree>
+      <p:nvGrpSpPr>
+        <p:cNvPr id="1" name=""/>
+        <p:cNvGrpSpPr/>
+        <p:nvPr/>
+      </p:nvGrpSpPr>
+      <p:grpSpPr>
+        <a:xfrm>
+          <a:off x="0" y="0"/>
+          <a:ext cx="0" cy="0"/>
+          <a:chOff x="0" y="0"/>
+          <a:chExt cx="0" cy="0"/>
+        </a:xfrm>
+      </p:grpSpPr>
+      <p:pic>
+        <p:nvPicPr>
+          <p:cNvPr id="5" name="Picture 4">
+            <a:extLst>
+              <a:ext uri="{FF2B5EF4-FFF2-40B4-BE49-F238E27FC236}">
+                <a16:creationId xmlns:a16="http://schemas.microsoft.com/office/drawing/2014/main" id="{B92E26C4-6199-96F0-AEDF-1ED7FBAF55B7}"/>
+              </a:ext>
+            </a:extLst>
+          </p:cNvPr>
+          <p:cNvPicPr>
+            <a:picLocks noChangeAspect="1"/>
+          </p:cNvPicPr>
+          <p:nvPr/>
+        </p:nvPicPr>
+        <p:blipFill>
+          <a:blip r:embed="rId2"/>
+          <a:stretch>
+            <a:fillRect/>
+          </a:stretch>
+        </p:blipFill>
+        <p:spPr>
+          <a:xfrm>
+            <a:off x="397167" y="275015"/>
+            <a:ext cx="8332235" cy="4287841"/>
+          </a:xfrm>
+          <a:prstGeom prst="rect">
+            <a:avLst/>
+          </a:prstGeom>
+        </p:spPr>
+      </p:pic>
+    </p:spTree>
+    <p:extLst>
+      <p:ext uri="{BB962C8B-B14F-4D97-AF65-F5344CB8AC3E}">
+        <p14:creationId xmlns:p14="http://schemas.microsoft.com/office/powerpoint/2010/main" val="3583895716"/>
       </p:ext>
     </p:extLst>
   </p:cSld>

--- a/slides/slides_functions.pptx
+++ b/slides/slides_functions.pptx
@@ -3918,6 +3918,38 @@
           </a:prstGeom>
         </p:spPr>
       </p:pic>
+      <p:sp>
+        <p:nvSpPr>
+          <p:cNvPr id="6" name="TextBox 5">
+            <a:extLst>
+              <a:ext uri="{FF2B5EF4-FFF2-40B4-BE49-F238E27FC236}">
+                <a16:creationId xmlns:a16="http://schemas.microsoft.com/office/drawing/2014/main" id="{E3190079-35AC-72A1-4EC1-DDD5BE545B88}"/>
+              </a:ext>
+            </a:extLst>
+          </p:cNvPr>
+          <p:cNvSpPr txBox="1"/>
+          <p:nvPr/>
+        </p:nvSpPr>
+        <p:spPr>
+          <a:xfrm>
+            <a:off x="-1097280" y="-1719072"/>
+            <a:ext cx="184731" cy="369332"/>
+          </a:xfrm>
+          <a:prstGeom prst="rect">
+            <a:avLst/>
+          </a:prstGeom>
+          <a:noFill/>
+        </p:spPr>
+        <p:txBody>
+          <a:bodyPr wrap="none" rtlCol="0">
+            <a:spAutoFit/>
+          </a:bodyPr>
+          <a:lstStyle/>
+          <a:p>
+            <a:endParaRPr lang="en-US"/>
+          </a:p>
+        </p:txBody>
+      </p:sp>
     </p:spTree>
     <p:extLst>
       <p:ext uri="{BB962C8B-B14F-4D97-AF65-F5344CB8AC3E}">
